--- a/public/fun/pack/pptx/news/카드뉴스_07_건강·안심습관_뒷산진달래.pptx
+++ b/public/fun/pack/pptx/news/카드뉴스_07_건강·안심습관_뒷산진달래.pptx
@@ -3348,7 +3348,7 @@
             <a:r>
               <a:rPr sz="3000" b="1" i="0">
                 <a:solidFill>
-                  <a:srgbClr val="71285B"/>
+                  <a:srgbClr val="721D59"/>
                 </a:solidFill>
               </a:rPr>
               <a:t>아침 물 한 잔으로 시작하는 하루</a:t>
@@ -3386,7 +3386,7 @@
             <a:r>
               <a:rPr sz="1500" b="0" i="1">
                 <a:solidFill>
-                  <a:srgbClr val="71285B"/>
+                  <a:srgbClr val="721D59"/>
                 </a:solidFill>
               </a:rPr>
               <a:t>옆으로 넘겨 보세요 →</a:t>
@@ -3473,7 +3473,7 @@
             <a:avLst/>
           </a:prstGeom>
           <a:solidFill>
-            <a:srgbClr val="F1D0E7"/>
+            <a:srgbClr val="F7D4ED"/>
           </a:solidFill>
           <a:ln>
             <a:noFill/>
@@ -3502,7 +3502,7 @@
             <a:avLst/>
           </a:prstGeom>
           <a:solidFill>
-            <a:srgbClr val="BD4298"/>
+            <a:srgbClr val="D345A9"/>
           </a:solidFill>
           <a:ln>
             <a:noFill/>
@@ -3546,7 +3546,7 @@
             <a:r>
               <a:rPr sz="2600" b="1" i="0">
                 <a:solidFill>
-                  <a:srgbClr val="71285B"/>
+                  <a:srgbClr val="721D59"/>
                 </a:solidFill>
               </a:rPr>
               <a:t>아침 물 한 잔</a:t>
@@ -3584,7 +3584,7 @@
             <a:r>
               <a:rPr sz="6600" b="1" i="0">
                 <a:solidFill>
-                  <a:srgbClr val="BD4298"/>
+                  <a:srgbClr val="D345A9"/>
                 </a:solidFill>
               </a:rPr>
               <a:t>01</a:t>
@@ -3709,7 +3709,7 @@
             <a:avLst/>
           </a:prstGeom>
           <a:solidFill>
-            <a:srgbClr val="F1D0E7"/>
+            <a:srgbClr val="F7D4ED"/>
           </a:solidFill>
           <a:ln>
             <a:noFill/>
@@ -3738,7 +3738,7 @@
             <a:avLst/>
           </a:prstGeom>
           <a:solidFill>
-            <a:srgbClr val="BD4298"/>
+            <a:srgbClr val="D345A9"/>
           </a:solidFill>
           <a:ln>
             <a:noFill/>
@@ -3782,7 +3782,7 @@
             <a:r>
               <a:rPr sz="2600" b="1" i="0">
                 <a:solidFill>
-                  <a:srgbClr val="71285B"/>
+                  <a:srgbClr val="721D59"/>
                 </a:solidFill>
               </a:rPr>
               <a:t>하루 십 분 걷기</a:t>
@@ -3820,7 +3820,7 @@
             <a:r>
               <a:rPr sz="6600" b="1" i="0">
                 <a:solidFill>
-                  <a:srgbClr val="BD4298"/>
+                  <a:srgbClr val="D345A9"/>
                 </a:solidFill>
               </a:rPr>
               <a:t>02</a:t>
@@ -3945,7 +3945,7 @@
             <a:avLst/>
           </a:prstGeom>
           <a:solidFill>
-            <a:srgbClr val="F1D0E7"/>
+            <a:srgbClr val="F7D4ED"/>
           </a:solidFill>
           <a:ln>
             <a:noFill/>
@@ -3974,7 +3974,7 @@
             <a:avLst/>
           </a:prstGeom>
           <a:solidFill>
-            <a:srgbClr val="BD4298"/>
+            <a:srgbClr val="D345A9"/>
           </a:solidFill>
           <a:ln>
             <a:noFill/>
@@ -4018,7 +4018,7 @@
             <a:r>
               <a:rPr sz="2600" b="1" i="0">
                 <a:solidFill>
-                  <a:srgbClr val="71285B"/>
+                  <a:srgbClr val="721D59"/>
                 </a:solidFill>
               </a:rPr>
               <a:t>검진 날짜 적어 두기</a:t>
@@ -4056,7 +4056,7 @@
             <a:r>
               <a:rPr sz="6600" b="1" i="0">
                 <a:solidFill>
-                  <a:srgbClr val="BD4298"/>
+                  <a:srgbClr val="D345A9"/>
                 </a:solidFill>
               </a:rPr>
               <a:t>03</a:t>
@@ -4181,7 +4181,7 @@
             <a:avLst/>
           </a:prstGeom>
           <a:solidFill>
-            <a:srgbClr val="F1D0E7"/>
+            <a:srgbClr val="F7D4ED"/>
           </a:solidFill>
           <a:ln>
             <a:noFill/>
@@ -4210,7 +4210,7 @@
             <a:avLst/>
           </a:prstGeom>
           <a:solidFill>
-            <a:srgbClr val="BD4298"/>
+            <a:srgbClr val="D345A9"/>
           </a:solidFill>
           <a:ln>
             <a:noFill/>
@@ -4254,7 +4254,7 @@
             <a:r>
               <a:rPr sz="2600" b="1" i="0">
                 <a:solidFill>
-                  <a:srgbClr val="71285B"/>
+                  <a:srgbClr val="721D59"/>
                 </a:solidFill>
               </a:rPr>
               <a:t>잠들기 전 스마트폰 내려놓기</a:t>
@@ -4292,7 +4292,7 @@
             <a:r>
               <a:rPr sz="6600" b="1" i="0">
                 <a:solidFill>
-                  <a:srgbClr val="BD4298"/>
+                  <a:srgbClr val="D345A9"/>
                 </a:solidFill>
               </a:rPr>
               <a:t>04</a:t>
@@ -4417,7 +4417,7 @@
             <a:avLst/>
           </a:prstGeom>
           <a:solidFill>
-            <a:srgbClr val="F1D0E7"/>
+            <a:srgbClr val="F7D4ED"/>
           </a:solidFill>
           <a:ln>
             <a:noFill/>
@@ -4446,7 +4446,7 @@
             <a:avLst/>
           </a:prstGeom>
           <a:solidFill>
-            <a:srgbClr val="BD4298"/>
+            <a:srgbClr val="D345A9"/>
           </a:solidFill>
           <a:ln>
             <a:noFill/>
@@ -4490,7 +4490,7 @@
             <a:r>
               <a:rPr sz="2600" b="1" i="0">
                 <a:solidFill>
-                  <a:srgbClr val="71285B"/>
+                  <a:srgbClr val="721D59"/>
                 </a:solidFill>
               </a:rPr>
               <a:t>가족 건강 이야기 나누기</a:t>
@@ -4528,7 +4528,7 @@
             <a:r>
               <a:rPr sz="6600" b="1" i="0">
                 <a:solidFill>
-                  <a:srgbClr val="BD4298"/>
+                  <a:srgbClr val="D345A9"/>
                 </a:solidFill>
               </a:rPr>
               <a:t>05</a:t>
@@ -4684,7 +4684,7 @@
             <a:r>
               <a:rPr sz="2800" b="1" i="0">
                 <a:solidFill>
-                  <a:srgbClr val="71285B"/>
+                  <a:srgbClr val="721D59"/>
                 </a:solidFill>
               </a:rPr>
               <a:t>저장해 두고 필요할 때 꺼내 보세요</a:t>
@@ -4722,7 +4722,7 @@
             <a:r>
               <a:rPr sz="1500" b="0" i="1">
                 <a:solidFill>
-                  <a:srgbClr val="71285B"/>
+                  <a:srgbClr val="721D59"/>
                 </a:solidFill>
               </a:rPr>
               <a:t>마음에 들면 공유해 주세요</a:t>
@@ -4787,34 +4787,34 @@
         <a:sysClr val="window" lastClr="FFFFFF"/>
       </a:lt1>
       <a:dk2>
-        <a:srgbClr val="71285B"/>
+        <a:srgbClr val="721D59"/>
       </a:dk2>
       <a:lt2>
-        <a:srgbClr val="FAF0F7"/>
+        <a:srgbClr val="FCF3F9"/>
       </a:lt2>
       <a:accent1>
-        <a:srgbClr val="BD4298"/>
+        <a:srgbClr val="D345A9"/>
       </a:accent1>
       <a:accent2>
-        <a:srgbClr val="4C913B"/>
+        <a:srgbClr val="339941"/>
       </a:accent2>
       <a:accent3>
-        <a:srgbClr val="71285B"/>
+        <a:srgbClr val="721D59"/>
       </a:accent3>
       <a:accent4>
-        <a:srgbClr val="F1D0E7"/>
+        <a:srgbClr val="F7D4ED"/>
       </a:accent4>
       <a:accent5>
-        <a:srgbClr val="846A6A"/>
+        <a:srgbClr val="836F75"/>
       </a:accent5>
       <a:accent6>
-        <a:srgbClr val="AA7E9D"/>
+        <a:srgbClr val="AA779B"/>
       </a:accent6>
       <a:hlink>
-        <a:srgbClr val="BD4298"/>
+        <a:srgbClr val="D345A9"/>
       </a:hlink>
       <a:folHlink>
-        <a:srgbClr val="71285B"/>
+        <a:srgbClr val="721D59"/>
       </a:folHlink>
     </a:clrScheme>
     <a:fontScheme name="Office">

--- a/public/fun/pack/pptx/news/카드뉴스_07_건강·안심습관_뒷산진달래.pptx
+++ b/public/fun/pack/pptx/news/카드뉴스_07_건강·안심습관_뒷산진달래.pptx
@@ -3287,6 +3287,14 @@
 <file path=ppt/slides/slide1.xml><?xml version="1.0" encoding="utf-8"?>
 <p:sld xmlns:a="http://schemas.openxmlformats.org/drawingml/2006/main" xmlns:p="http://schemas.openxmlformats.org/presentationml/2006/main" xmlns:r="http://schemas.openxmlformats.org/officeDocument/2006/relationships">
   <p:cSld>
+    <p:bg>
+      <p:bgPr>
+        <a:solidFill>
+          <a:srgbClr val="FDEAF7"/>
+        </a:solidFill>
+        <a:effectLst/>
+      </p:bgPr>
+    </p:bg>
     <p:spTree>
       <p:nvGrpSpPr>
         <p:cNvPr id="1" name=""/>
@@ -3294,30 +3302,102 @@
         <p:nvPr/>
       </p:nvGrpSpPr>
       <p:grpSpPr/>
-      <p:pic>
-        <p:nvPicPr>
-          <p:cNvPr id="3" name="표지 그림" descr="news-07.jpg"/>
-          <p:cNvPicPr>
-            <a:picLocks noChangeAspect="1"/>
-          </p:cNvPicPr>
+      <p:sp>
+        <p:nvSpPr>
+          <p:cNvPr id="3" name="장식"/>
+          <p:cNvSpPr/>
           <p:nvPr/>
-        </p:nvPicPr>
-        <p:blipFill>
-          <a:blip r:embed="rId2"/>
-          <a:stretch>
-            <a:fillRect/>
-          </a:stretch>
-        </p:blipFill>
-        <p:spPr>
-          <a:xfrm>
-            <a:off x="0" y="0"/>
-            <a:ext cx="6858000" cy="6858000"/>
+        </p:nvSpPr>
+        <p:spPr>
+          <a:xfrm>
+            <a:off x="1600200" y="822960"/>
+            <a:ext cx="3657600" cy="3657600"/>
+          </a:xfrm>
+          <a:prstGeom prst="ellipse">
+            <a:avLst/>
+          </a:prstGeom>
+          <a:solidFill>
+            <a:srgbClr val="ED97D3"/>
+          </a:solidFill>
+          <a:ln>
+            <a:noFill/>
+          </a:ln>
+        </p:spPr>
+        <p:txBody>
+          <a:bodyPr rtlCol="0" anchor="ctr"/>
+          <a:lstStyle/>
+          <a:p>
+            <a:pPr algn="ctr"/>
+          </a:p>
+        </p:txBody>
+      </p:sp>
+      <p:sp>
+        <p:nvSpPr>
+          <p:cNvPr id="4" name="장식"/>
+          <p:cNvSpPr/>
+          <p:nvPr/>
+        </p:nvSpPr>
+        <p:spPr>
+          <a:xfrm>
+            <a:off x="3246120" y="502920"/>
+            <a:ext cx="822960" cy="822960"/>
+          </a:xfrm>
+          <a:prstGeom prst="ellipse">
+            <a:avLst/>
+          </a:prstGeom>
+          <a:solidFill>
+            <a:srgbClr val="F2A6DB"/>
+          </a:solidFill>
+          <a:ln>
+            <a:noFill/>
+          </a:ln>
+        </p:spPr>
+        <p:txBody>
+          <a:bodyPr rtlCol="0" anchor="ctr"/>
+          <a:lstStyle/>
+          <a:p>
+            <a:pPr algn="ctr"/>
+          </a:p>
+        </p:txBody>
+      </p:sp>
+      <p:sp>
+        <p:nvSpPr>
+          <p:cNvPr id="5" name="라벨"/>
+          <p:cNvSpPr txBox="1"/>
+          <p:nvPr/>
+        </p:nvSpPr>
+        <p:spPr>
+          <a:xfrm>
+            <a:off x="731520" y="4572000"/>
+            <a:ext cx="5394960" cy="274320"/>
           </a:xfrm>
           <a:prstGeom prst="rect">
             <a:avLst/>
           </a:prstGeom>
-        </p:spPr>
-      </p:pic>
+          <a:noFill/>
+        </p:spPr>
+        <p:txBody>
+          <a:bodyPr wrap="square" lIns="54864" rIns="54864" tIns="27432" bIns="27432" anchor="t">
+            <a:noAutofit/>
+          </a:bodyPr>
+          <a:lstStyle/>
+          <a:p>
+            <a:pPr algn="ctr">
+              <a:lnSpc>
+                <a:spcPct val="115000"/>
+              </a:lnSpc>
+            </a:pPr>
+            <a:r>
+              <a:rPr sz="1000" b="1" i="0" spc="250">
+                <a:solidFill>
+                  <a:srgbClr val="26231F"/>
+                </a:solidFill>
+              </a:rPr>
+              <a:t>CARD NEWS</a:t>
+            </a:r>
+          </a:p>
+        </p:txBody>
+      </p:sp>
       <p:sp>
         <p:nvSpPr>
           <p:cNvPr id="2" name="Title 1"/>
@@ -3330,8 +3410,8 @@
         </p:nvSpPr>
         <p:spPr>
           <a:xfrm>
-            <a:off x="685800" y="960120"/>
-            <a:ext cx="5486400" cy="1463040"/>
+            <a:off x="731520" y="4892040"/>
+            <a:ext cx="5394960" cy="914400"/>
           </a:xfrm>
         </p:spPr>
         <p:txBody>
@@ -3340,7 +3420,7 @@
           </a:bodyPr>
           <a:lstStyle/>
           <a:p>
-            <a:pPr algn="l">
+            <a:pPr algn="ctr">
               <a:lnSpc>
                 <a:spcPct val="105000"/>
               </a:lnSpc>
@@ -3348,7 +3428,7 @@
             <a:r>
               <a:rPr sz="3000" b="1" i="0">
                 <a:solidFill>
-                  <a:srgbClr val="721D59"/>
+                  <a:srgbClr val="26231F"/>
                 </a:solidFill>
               </a:rPr>
               <a:t>아침 물 한 잔으로 시작하는 하루</a:t>
@@ -3358,14 +3438,14 @@
       </p:sp>
       <p:sp>
         <p:nvSpPr>
-          <p:cNvPr id="4" name="한 줄 문구"/>
+          <p:cNvPr id="6" name="한 줄 문구"/>
           <p:cNvSpPr txBox="1"/>
           <p:nvPr/>
         </p:nvSpPr>
         <p:spPr>
           <a:xfrm>
-            <a:off x="685800" y="2560320"/>
-            <a:ext cx="5486400" cy="822960"/>
+            <a:off x="731520" y="5806440"/>
+            <a:ext cx="5394960" cy="822960"/>
           </a:xfrm>
           <a:prstGeom prst="rect">
             <a:avLst/>
@@ -3378,15 +3458,15 @@
           </a:bodyPr>
           <a:lstStyle/>
           <a:p>
-            <a:pPr algn="l">
+            <a:pPr algn="ctr">
               <a:lnSpc>
                 <a:spcPct val="115000"/>
               </a:lnSpc>
             </a:pPr>
             <a:r>
-              <a:rPr sz="1500" b="0" i="1">
+              <a:rPr sz="1500" b="0" i="0">
                 <a:solidFill>
-                  <a:srgbClr val="721D59"/>
+                  <a:srgbClr val="26231F"/>
                 </a:solidFill>
               </a:rPr>
               <a:t>옆으로 넘겨 보세요 →</a:t>
@@ -3396,14 +3476,14 @@
       </p:sp>
       <p:sp>
         <p:nvSpPr>
-          <p:cNvPr id="5" name="안내 문구"/>
+          <p:cNvPr id="7" name="안내 문구"/>
           <p:cNvSpPr txBox="1"/>
           <p:nvPr/>
         </p:nvSpPr>
         <p:spPr>
           <a:xfrm>
-            <a:off x="685800" y="3429000"/>
-            <a:ext cx="5486400" cy="914400"/>
+            <a:off x="731520" y="6675120"/>
+            <a:ext cx="5394960" cy="914400"/>
           </a:xfrm>
           <a:prstGeom prst="rect">
             <a:avLst/>
@@ -3416,7 +3496,7 @@
           </a:bodyPr>
           <a:lstStyle/>
           <a:p>
-            <a:pPr algn="l">
+            <a:pPr algn="ctr">
               <a:lnSpc>
                 <a:spcPct val="115000"/>
               </a:lnSpc>
@@ -3424,7 +3504,7 @@
             <a:r>
               <a:rPr sz="1200" b="0" i="0">
                 <a:solidFill>
-                  <a:srgbClr val="666666"/>
+                  <a:srgbClr val="26231F"/>
                 </a:solidFill>
               </a:rPr>
               <a:t>건강·안심 습관 · 카드뉴스</a:t>
@@ -3446,7 +3526,7 @@
     <p:bg>
       <p:bgPr>
         <a:solidFill>
-          <a:srgbClr val="FFFFFF"/>
+          <a:srgbClr val="FDFAFC"/>
         </a:solidFill>
         <a:effectLst/>
       </p:bgPr>
@@ -3466,14 +3546,14 @@
         </p:nvSpPr>
         <p:spPr>
           <a:xfrm>
-            <a:off x="-182880" y="6144768"/>
-            <a:ext cx="7223760" cy="731520"/>
-          </a:xfrm>
-          <a:prstGeom prst="wave">
+            <a:off x="4846320" y="-1645920"/>
+            <a:ext cx="3474720" cy="3474720"/>
+          </a:xfrm>
+          <a:prstGeom prst="ellipse">
             <a:avLst/>
           </a:prstGeom>
           <a:solidFill>
-            <a:srgbClr val="FBDAF1"/>
+            <a:srgbClr val="F2A6DB"/>
           </a:solidFill>
           <a:ln>
             <a:noFill/>
@@ -3489,20 +3569,58 @@
       </p:sp>
       <p:sp>
         <p:nvSpPr>
-          <p:cNvPr id="4" name="장식"/>
+          <p:cNvPr id="4" name="상단 라벨"/>
+          <p:cNvSpPr txBox="1"/>
+          <p:nvPr/>
+        </p:nvSpPr>
+        <p:spPr>
+          <a:xfrm>
+            <a:off x="640080" y="274320"/>
+            <a:ext cx="5486400" cy="274320"/>
+          </a:xfrm>
+          <a:prstGeom prst="rect">
+            <a:avLst/>
+          </a:prstGeom>
+          <a:noFill/>
+        </p:spPr>
+        <p:txBody>
+          <a:bodyPr wrap="square" lIns="54864" rIns="54864" tIns="27432" bIns="27432" anchor="ctr">
+            <a:noAutofit/>
+          </a:bodyPr>
+          <a:lstStyle/>
+          <a:p>
+            <a:pPr algn="l">
+              <a:lnSpc>
+                <a:spcPct val="115000"/>
+              </a:lnSpc>
+            </a:pPr>
+            <a:r>
+              <a:rPr sz="900" b="1" i="0" spc="250">
+                <a:solidFill>
+                  <a:srgbClr val="26231F"/>
+                </a:solidFill>
+              </a:rPr>
+              <a:t>CARD NEWS</a:t>
+            </a:r>
+          </a:p>
+        </p:txBody>
+      </p:sp>
+      <p:sp>
+        <p:nvSpPr>
+          <p:cNvPr id="5" name="포인트"/>
           <p:cNvSpPr/>
           <p:nvPr/>
         </p:nvSpPr>
         <p:spPr>
           <a:xfrm>
-            <a:off x="-182880" y="6400800"/>
-            <a:ext cx="7223760" cy="502920"/>
-          </a:xfrm>
-          <a:prstGeom prst="wave">
+            <a:off x="5715000" y="502919"/>
+            <a:ext cx="274320" cy="274320"/>
+          </a:xfrm>
+          <a:prstGeom prst="heart">
             <a:avLst/>
           </a:prstGeom>
           <a:solidFill>
-            <a:srgbClr val="DD4BB1"/>
+            <a:srgbClr val="FFFFFF"/>
           </a:solidFill>
           <a:ln>
             <a:noFill/>
@@ -3528,8 +3646,8 @@
         </p:nvSpPr>
         <p:spPr>
           <a:xfrm>
-            <a:off x="640080" y="457200"/>
-            <a:ext cx="4389120" cy="868680"/>
+            <a:off x="640080" y="658368"/>
+            <a:ext cx="3749039" cy="868680"/>
           </a:xfrm>
         </p:spPr>
         <p:txBody>
@@ -3546,7 +3664,7 @@
             <a:r>
               <a:rPr sz="2600" b="1" i="0">
                 <a:solidFill>
-                  <a:srgbClr val="721D59"/>
+                  <a:srgbClr val="26231F"/>
                 </a:solidFill>
               </a:rPr>
               <a:t>아침 물 한 잔</a:t>
@@ -3556,13 +3674,13 @@
       </p:sp>
       <p:sp>
         <p:nvSpPr>
-          <p:cNvPr id="5" name="번호"/>
+          <p:cNvPr id="6" name="번호"/>
           <p:cNvSpPr txBox="1"/>
           <p:nvPr/>
         </p:nvSpPr>
         <p:spPr>
           <a:xfrm>
-            <a:off x="640080" y="1645920"/>
+            <a:off x="640080" y="1874519"/>
             <a:ext cx="2194560" cy="1280160"/>
           </a:xfrm>
           <a:prstGeom prst="rect">
@@ -3584,7 +3702,7 @@
             <a:r>
               <a:rPr sz="6600" b="1" i="0">
                 <a:solidFill>
-                  <a:srgbClr val="DD4BB1"/>
+                  <a:srgbClr val="ED97D3"/>
                 </a:solidFill>
               </a:rPr>
               <a:t>01</a:t>
@@ -3594,13 +3712,13 @@
       </p:sp>
       <p:sp>
         <p:nvSpPr>
-          <p:cNvPr id="6" name="본문"/>
+          <p:cNvPr id="7" name="본문"/>
           <p:cNvSpPr txBox="1"/>
           <p:nvPr/>
         </p:nvSpPr>
         <p:spPr>
           <a:xfrm>
-            <a:off x="640080" y="3108960"/>
+            <a:off x="640080" y="3337560"/>
             <a:ext cx="5577840" cy="2651760"/>
           </a:xfrm>
           <a:prstGeom prst="rect">
@@ -3622,7 +3740,7 @@
             <a:r>
               <a:rPr sz="2800" b="0" i="0">
                 <a:solidFill>
-                  <a:srgbClr val="2B2B2B"/>
+                  <a:srgbClr val="26231F"/>
                 </a:solidFill>
               </a:rPr>
               <a:t>일어나자마자 미지근한 물 한 잔으로 하루를 시작해 보세요.</a:t>
@@ -3632,13 +3750,13 @@
       </p:sp>
       <p:sp>
         <p:nvSpPr>
-          <p:cNvPr id="7" name="쪽 번호"/>
+          <p:cNvPr id="8" name="쪽 번호"/>
           <p:cNvSpPr txBox="1"/>
           <p:nvPr/>
         </p:nvSpPr>
         <p:spPr>
           <a:xfrm>
-            <a:off x="640080" y="5577840"/>
+            <a:off x="640080" y="5989320"/>
             <a:ext cx="5577840" cy="365760"/>
           </a:xfrm>
           <a:prstGeom prst="rect">
@@ -3682,7 +3800,7 @@
     <p:bg>
       <p:bgPr>
         <a:solidFill>
-          <a:srgbClr val="FFFFFF"/>
+          <a:srgbClr val="FDFAFC"/>
         </a:solidFill>
         <a:effectLst/>
       </p:bgPr>
@@ -3702,14 +3820,14 @@
         </p:nvSpPr>
         <p:spPr>
           <a:xfrm>
-            <a:off x="-182880" y="6144768"/>
-            <a:ext cx="7223760" cy="731520"/>
-          </a:xfrm>
-          <a:prstGeom prst="wave">
+            <a:off x="4846320" y="-1645920"/>
+            <a:ext cx="3474720" cy="3474720"/>
+          </a:xfrm>
+          <a:prstGeom prst="ellipse">
             <a:avLst/>
           </a:prstGeom>
           <a:solidFill>
-            <a:srgbClr val="FBDAF1"/>
+            <a:srgbClr val="F2A6DB"/>
           </a:solidFill>
           <a:ln>
             <a:noFill/>
@@ -3725,20 +3843,58 @@
       </p:sp>
       <p:sp>
         <p:nvSpPr>
-          <p:cNvPr id="4" name="장식"/>
+          <p:cNvPr id="4" name="상단 라벨"/>
+          <p:cNvSpPr txBox="1"/>
+          <p:nvPr/>
+        </p:nvSpPr>
+        <p:spPr>
+          <a:xfrm>
+            <a:off x="640080" y="274320"/>
+            <a:ext cx="5486400" cy="274320"/>
+          </a:xfrm>
+          <a:prstGeom prst="rect">
+            <a:avLst/>
+          </a:prstGeom>
+          <a:noFill/>
+        </p:spPr>
+        <p:txBody>
+          <a:bodyPr wrap="square" lIns="54864" rIns="54864" tIns="27432" bIns="27432" anchor="ctr">
+            <a:noAutofit/>
+          </a:bodyPr>
+          <a:lstStyle/>
+          <a:p>
+            <a:pPr algn="l">
+              <a:lnSpc>
+                <a:spcPct val="115000"/>
+              </a:lnSpc>
+            </a:pPr>
+            <a:r>
+              <a:rPr sz="900" b="1" i="0" spc="250">
+                <a:solidFill>
+                  <a:srgbClr val="26231F"/>
+                </a:solidFill>
+              </a:rPr>
+              <a:t>CARD NEWS</a:t>
+            </a:r>
+          </a:p>
+        </p:txBody>
+      </p:sp>
+      <p:sp>
+        <p:nvSpPr>
+          <p:cNvPr id="5" name="포인트"/>
           <p:cNvSpPr/>
           <p:nvPr/>
         </p:nvSpPr>
         <p:spPr>
           <a:xfrm>
-            <a:off x="-182880" y="6400800"/>
-            <a:ext cx="7223760" cy="502920"/>
-          </a:xfrm>
-          <a:prstGeom prst="wave">
+            <a:off x="5715000" y="502919"/>
+            <a:ext cx="274320" cy="274320"/>
+          </a:xfrm>
+          <a:prstGeom prst="heart">
             <a:avLst/>
           </a:prstGeom>
           <a:solidFill>
-            <a:srgbClr val="DD4BB1"/>
+            <a:srgbClr val="FFFFFF"/>
           </a:solidFill>
           <a:ln>
             <a:noFill/>
@@ -3764,8 +3920,8 @@
         </p:nvSpPr>
         <p:spPr>
           <a:xfrm>
-            <a:off x="640080" y="457200"/>
-            <a:ext cx="4389120" cy="868680"/>
+            <a:off x="640080" y="658368"/>
+            <a:ext cx="3749039" cy="868680"/>
           </a:xfrm>
         </p:spPr>
         <p:txBody>
@@ -3782,7 +3938,7 @@
             <a:r>
               <a:rPr sz="2600" b="1" i="0">
                 <a:solidFill>
-                  <a:srgbClr val="721D59"/>
+                  <a:srgbClr val="26231F"/>
                 </a:solidFill>
               </a:rPr>
               <a:t>하루 십 분 걷기</a:t>
@@ -3792,13 +3948,13 @@
       </p:sp>
       <p:sp>
         <p:nvSpPr>
-          <p:cNvPr id="5" name="번호"/>
+          <p:cNvPr id="6" name="번호"/>
           <p:cNvSpPr txBox="1"/>
           <p:nvPr/>
         </p:nvSpPr>
         <p:spPr>
           <a:xfrm>
-            <a:off x="640080" y="1645920"/>
+            <a:off x="640080" y="1874519"/>
             <a:ext cx="2194560" cy="1280160"/>
           </a:xfrm>
           <a:prstGeom prst="rect">
@@ -3820,7 +3976,7 @@
             <a:r>
               <a:rPr sz="6600" b="1" i="0">
                 <a:solidFill>
-                  <a:srgbClr val="DD4BB1"/>
+                  <a:srgbClr val="ED97D3"/>
                 </a:solidFill>
               </a:rPr>
               <a:t>02</a:t>
@@ -3830,13 +3986,13 @@
       </p:sp>
       <p:sp>
         <p:nvSpPr>
-          <p:cNvPr id="6" name="본문"/>
+          <p:cNvPr id="7" name="본문"/>
           <p:cNvSpPr txBox="1"/>
           <p:nvPr/>
         </p:nvSpPr>
         <p:spPr>
           <a:xfrm>
-            <a:off x="640080" y="3108960"/>
+            <a:off x="640080" y="3337560"/>
             <a:ext cx="5577840" cy="2651760"/>
           </a:xfrm>
           <a:prstGeom prst="rect">
@@ -3858,7 +4014,7 @@
             <a:r>
               <a:rPr sz="2800" b="0" i="0">
                 <a:solidFill>
-                  <a:srgbClr val="2B2B2B"/>
+                  <a:srgbClr val="26231F"/>
                 </a:solidFill>
               </a:rPr>
               <a:t>점심 식사 후 십 분만 걸어도 몸이 한결 가벼워져요.</a:t>
@@ -3868,13 +4024,13 @@
       </p:sp>
       <p:sp>
         <p:nvSpPr>
-          <p:cNvPr id="7" name="쪽 번호"/>
+          <p:cNvPr id="8" name="쪽 번호"/>
           <p:cNvSpPr txBox="1"/>
           <p:nvPr/>
         </p:nvSpPr>
         <p:spPr>
           <a:xfrm>
-            <a:off x="640080" y="5577840"/>
+            <a:off x="640080" y="5989320"/>
             <a:ext cx="5577840" cy="365760"/>
           </a:xfrm>
           <a:prstGeom prst="rect">
@@ -3918,7 +4074,7 @@
     <p:bg>
       <p:bgPr>
         <a:solidFill>
-          <a:srgbClr val="FFFFFF"/>
+          <a:srgbClr val="FDFAFC"/>
         </a:solidFill>
         <a:effectLst/>
       </p:bgPr>
@@ -3938,14 +4094,14 @@
         </p:nvSpPr>
         <p:spPr>
           <a:xfrm>
-            <a:off x="-182880" y="6144768"/>
-            <a:ext cx="7223760" cy="731520"/>
-          </a:xfrm>
-          <a:prstGeom prst="wave">
+            <a:off x="4846320" y="-1645920"/>
+            <a:ext cx="3474720" cy="3474720"/>
+          </a:xfrm>
+          <a:prstGeom prst="ellipse">
             <a:avLst/>
           </a:prstGeom>
           <a:solidFill>
-            <a:srgbClr val="FBDAF1"/>
+            <a:srgbClr val="F2A6DB"/>
           </a:solidFill>
           <a:ln>
             <a:noFill/>
@@ -3961,20 +4117,58 @@
       </p:sp>
       <p:sp>
         <p:nvSpPr>
-          <p:cNvPr id="4" name="장식"/>
+          <p:cNvPr id="4" name="상단 라벨"/>
+          <p:cNvSpPr txBox="1"/>
+          <p:nvPr/>
+        </p:nvSpPr>
+        <p:spPr>
+          <a:xfrm>
+            <a:off x="640080" y="274320"/>
+            <a:ext cx="5486400" cy="274320"/>
+          </a:xfrm>
+          <a:prstGeom prst="rect">
+            <a:avLst/>
+          </a:prstGeom>
+          <a:noFill/>
+        </p:spPr>
+        <p:txBody>
+          <a:bodyPr wrap="square" lIns="54864" rIns="54864" tIns="27432" bIns="27432" anchor="ctr">
+            <a:noAutofit/>
+          </a:bodyPr>
+          <a:lstStyle/>
+          <a:p>
+            <a:pPr algn="l">
+              <a:lnSpc>
+                <a:spcPct val="115000"/>
+              </a:lnSpc>
+            </a:pPr>
+            <a:r>
+              <a:rPr sz="900" b="1" i="0" spc="250">
+                <a:solidFill>
+                  <a:srgbClr val="26231F"/>
+                </a:solidFill>
+              </a:rPr>
+              <a:t>CARD NEWS</a:t>
+            </a:r>
+          </a:p>
+        </p:txBody>
+      </p:sp>
+      <p:sp>
+        <p:nvSpPr>
+          <p:cNvPr id="5" name="포인트"/>
           <p:cNvSpPr/>
           <p:nvPr/>
         </p:nvSpPr>
         <p:spPr>
           <a:xfrm>
-            <a:off x="-182880" y="6400800"/>
-            <a:ext cx="7223760" cy="502920"/>
-          </a:xfrm>
-          <a:prstGeom prst="wave">
+            <a:off x="5715000" y="502919"/>
+            <a:ext cx="274320" cy="274320"/>
+          </a:xfrm>
+          <a:prstGeom prst="heart">
             <a:avLst/>
           </a:prstGeom>
           <a:solidFill>
-            <a:srgbClr val="DD4BB1"/>
+            <a:srgbClr val="FFFFFF"/>
           </a:solidFill>
           <a:ln>
             <a:noFill/>
@@ -4000,8 +4194,8 @@
         </p:nvSpPr>
         <p:spPr>
           <a:xfrm>
-            <a:off x="640080" y="457200"/>
-            <a:ext cx="4389120" cy="868680"/>
+            <a:off x="640080" y="658368"/>
+            <a:ext cx="3749039" cy="868680"/>
           </a:xfrm>
         </p:spPr>
         <p:txBody>
@@ -4018,7 +4212,7 @@
             <a:r>
               <a:rPr sz="2600" b="1" i="0">
                 <a:solidFill>
-                  <a:srgbClr val="721D59"/>
+                  <a:srgbClr val="26231F"/>
                 </a:solidFill>
               </a:rPr>
               <a:t>검진 날짜 적어 두기</a:t>
@@ -4028,13 +4222,13 @@
       </p:sp>
       <p:sp>
         <p:nvSpPr>
-          <p:cNvPr id="5" name="번호"/>
+          <p:cNvPr id="6" name="번호"/>
           <p:cNvSpPr txBox="1"/>
           <p:nvPr/>
         </p:nvSpPr>
         <p:spPr>
           <a:xfrm>
-            <a:off x="640080" y="1645920"/>
+            <a:off x="640080" y="1874519"/>
             <a:ext cx="2194560" cy="1280160"/>
           </a:xfrm>
           <a:prstGeom prst="rect">
@@ -4056,7 +4250,7 @@
             <a:r>
               <a:rPr sz="6600" b="1" i="0">
                 <a:solidFill>
-                  <a:srgbClr val="DD4BB1"/>
+                  <a:srgbClr val="ED97D3"/>
                 </a:solidFill>
               </a:rPr>
               <a:t>03</a:t>
@@ -4066,13 +4260,13 @@
       </p:sp>
       <p:sp>
         <p:nvSpPr>
-          <p:cNvPr id="6" name="본문"/>
+          <p:cNvPr id="7" name="본문"/>
           <p:cNvSpPr txBox="1"/>
           <p:nvPr/>
         </p:nvSpPr>
         <p:spPr>
           <a:xfrm>
-            <a:off x="640080" y="3108960"/>
+            <a:off x="640080" y="3337560"/>
             <a:ext cx="5577840" cy="2651760"/>
           </a:xfrm>
           <a:prstGeom prst="rect">
@@ -4094,7 +4288,7 @@
             <a:r>
               <a:rPr sz="2800" b="0" i="0">
                 <a:solidFill>
-                  <a:srgbClr val="2B2B2B"/>
+                  <a:srgbClr val="26231F"/>
                 </a:solidFill>
               </a:rPr>
               <a:t>달력에 검진 예정일을 적어 두면 미루지 않게 돼요.</a:t>
@@ -4104,13 +4298,13 @@
       </p:sp>
       <p:sp>
         <p:nvSpPr>
-          <p:cNvPr id="7" name="쪽 번호"/>
+          <p:cNvPr id="8" name="쪽 번호"/>
           <p:cNvSpPr txBox="1"/>
           <p:nvPr/>
         </p:nvSpPr>
         <p:spPr>
           <a:xfrm>
-            <a:off x="640080" y="5577840"/>
+            <a:off x="640080" y="5989320"/>
             <a:ext cx="5577840" cy="365760"/>
           </a:xfrm>
           <a:prstGeom prst="rect">
@@ -4154,7 +4348,7 @@
     <p:bg>
       <p:bgPr>
         <a:solidFill>
-          <a:srgbClr val="FFFFFF"/>
+          <a:srgbClr val="FDFAFC"/>
         </a:solidFill>
         <a:effectLst/>
       </p:bgPr>
@@ -4174,14 +4368,14 @@
         </p:nvSpPr>
         <p:spPr>
           <a:xfrm>
-            <a:off x="-182880" y="6144768"/>
-            <a:ext cx="7223760" cy="731520"/>
-          </a:xfrm>
-          <a:prstGeom prst="wave">
+            <a:off x="4846320" y="-1645920"/>
+            <a:ext cx="3474720" cy="3474720"/>
+          </a:xfrm>
+          <a:prstGeom prst="ellipse">
             <a:avLst/>
           </a:prstGeom>
           <a:solidFill>
-            <a:srgbClr val="FBDAF1"/>
+            <a:srgbClr val="F2A6DB"/>
           </a:solidFill>
           <a:ln>
             <a:noFill/>
@@ -4197,20 +4391,58 @@
       </p:sp>
       <p:sp>
         <p:nvSpPr>
-          <p:cNvPr id="4" name="장식"/>
+          <p:cNvPr id="4" name="상단 라벨"/>
+          <p:cNvSpPr txBox="1"/>
+          <p:nvPr/>
+        </p:nvSpPr>
+        <p:spPr>
+          <a:xfrm>
+            <a:off x="640080" y="274320"/>
+            <a:ext cx="5486400" cy="274320"/>
+          </a:xfrm>
+          <a:prstGeom prst="rect">
+            <a:avLst/>
+          </a:prstGeom>
+          <a:noFill/>
+        </p:spPr>
+        <p:txBody>
+          <a:bodyPr wrap="square" lIns="54864" rIns="54864" tIns="27432" bIns="27432" anchor="ctr">
+            <a:noAutofit/>
+          </a:bodyPr>
+          <a:lstStyle/>
+          <a:p>
+            <a:pPr algn="l">
+              <a:lnSpc>
+                <a:spcPct val="115000"/>
+              </a:lnSpc>
+            </a:pPr>
+            <a:r>
+              <a:rPr sz="900" b="1" i="0" spc="250">
+                <a:solidFill>
+                  <a:srgbClr val="26231F"/>
+                </a:solidFill>
+              </a:rPr>
+              <a:t>CARD NEWS</a:t>
+            </a:r>
+          </a:p>
+        </p:txBody>
+      </p:sp>
+      <p:sp>
+        <p:nvSpPr>
+          <p:cNvPr id="5" name="포인트"/>
           <p:cNvSpPr/>
           <p:nvPr/>
         </p:nvSpPr>
         <p:spPr>
           <a:xfrm>
-            <a:off x="-182880" y="6400800"/>
-            <a:ext cx="7223760" cy="502920"/>
-          </a:xfrm>
-          <a:prstGeom prst="wave">
+            <a:off x="5715000" y="502919"/>
+            <a:ext cx="274320" cy="274320"/>
+          </a:xfrm>
+          <a:prstGeom prst="heart">
             <a:avLst/>
           </a:prstGeom>
           <a:solidFill>
-            <a:srgbClr val="DD4BB1"/>
+            <a:srgbClr val="FFFFFF"/>
           </a:solidFill>
           <a:ln>
             <a:noFill/>
@@ -4236,8 +4468,8 @@
         </p:nvSpPr>
         <p:spPr>
           <a:xfrm>
-            <a:off x="640080" y="457200"/>
-            <a:ext cx="4389120" cy="868680"/>
+            <a:off x="640080" y="658368"/>
+            <a:ext cx="3749039" cy="868680"/>
           </a:xfrm>
         </p:spPr>
         <p:txBody>
@@ -4254,7 +4486,7 @@
             <a:r>
               <a:rPr sz="2600" b="1" i="0">
                 <a:solidFill>
-                  <a:srgbClr val="721D59"/>
+                  <a:srgbClr val="26231F"/>
                 </a:solidFill>
               </a:rPr>
               <a:t>잠들기 전 스마트폰 내려놓기</a:t>
@@ -4264,13 +4496,13 @@
       </p:sp>
       <p:sp>
         <p:nvSpPr>
-          <p:cNvPr id="5" name="번호"/>
+          <p:cNvPr id="6" name="번호"/>
           <p:cNvSpPr txBox="1"/>
           <p:nvPr/>
         </p:nvSpPr>
         <p:spPr>
           <a:xfrm>
-            <a:off x="640080" y="1645920"/>
+            <a:off x="640080" y="1874519"/>
             <a:ext cx="2194560" cy="1280160"/>
           </a:xfrm>
           <a:prstGeom prst="rect">
@@ -4292,7 +4524,7 @@
             <a:r>
               <a:rPr sz="6600" b="1" i="0">
                 <a:solidFill>
-                  <a:srgbClr val="DD4BB1"/>
+                  <a:srgbClr val="ED97D3"/>
                 </a:solidFill>
               </a:rPr>
               <a:t>04</a:t>
@@ -4302,13 +4534,13 @@
       </p:sp>
       <p:sp>
         <p:nvSpPr>
-          <p:cNvPr id="6" name="본문"/>
+          <p:cNvPr id="7" name="본문"/>
           <p:cNvSpPr txBox="1"/>
           <p:nvPr/>
         </p:nvSpPr>
         <p:spPr>
           <a:xfrm>
-            <a:off x="640080" y="3108960"/>
+            <a:off x="640080" y="3337560"/>
             <a:ext cx="5577840" cy="2651760"/>
           </a:xfrm>
           <a:prstGeom prst="rect">
@@ -4330,7 +4562,7 @@
             <a:r>
               <a:rPr sz="2800" b="0" i="0">
                 <a:solidFill>
-                  <a:srgbClr val="2B2B2B"/>
+                  <a:srgbClr val="26231F"/>
                 </a:solidFill>
               </a:rPr>
               <a:t>잠자리에 들기 삼십 분 전에는 화면을 꺼 보세요.</a:t>
@@ -4340,13 +4572,13 @@
       </p:sp>
       <p:sp>
         <p:nvSpPr>
-          <p:cNvPr id="7" name="쪽 번호"/>
+          <p:cNvPr id="8" name="쪽 번호"/>
           <p:cNvSpPr txBox="1"/>
           <p:nvPr/>
         </p:nvSpPr>
         <p:spPr>
           <a:xfrm>
-            <a:off x="640080" y="5577840"/>
+            <a:off x="640080" y="5989320"/>
             <a:ext cx="5577840" cy="365760"/>
           </a:xfrm>
           <a:prstGeom prst="rect">
@@ -4390,7 +4622,7 @@
     <p:bg>
       <p:bgPr>
         <a:solidFill>
-          <a:srgbClr val="FFFFFF"/>
+          <a:srgbClr val="FDFAFC"/>
         </a:solidFill>
         <a:effectLst/>
       </p:bgPr>
@@ -4410,14 +4642,14 @@
         </p:nvSpPr>
         <p:spPr>
           <a:xfrm>
-            <a:off x="-182880" y="6144768"/>
-            <a:ext cx="7223760" cy="731520"/>
-          </a:xfrm>
-          <a:prstGeom prst="wave">
+            <a:off x="4846320" y="-1645920"/>
+            <a:ext cx="3474720" cy="3474720"/>
+          </a:xfrm>
+          <a:prstGeom prst="ellipse">
             <a:avLst/>
           </a:prstGeom>
           <a:solidFill>
-            <a:srgbClr val="FBDAF1"/>
+            <a:srgbClr val="F2A6DB"/>
           </a:solidFill>
           <a:ln>
             <a:noFill/>
@@ -4433,20 +4665,58 @@
       </p:sp>
       <p:sp>
         <p:nvSpPr>
-          <p:cNvPr id="4" name="장식"/>
+          <p:cNvPr id="4" name="상단 라벨"/>
+          <p:cNvSpPr txBox="1"/>
+          <p:nvPr/>
+        </p:nvSpPr>
+        <p:spPr>
+          <a:xfrm>
+            <a:off x="640080" y="274320"/>
+            <a:ext cx="5486400" cy="274320"/>
+          </a:xfrm>
+          <a:prstGeom prst="rect">
+            <a:avLst/>
+          </a:prstGeom>
+          <a:noFill/>
+        </p:spPr>
+        <p:txBody>
+          <a:bodyPr wrap="square" lIns="54864" rIns="54864" tIns="27432" bIns="27432" anchor="ctr">
+            <a:noAutofit/>
+          </a:bodyPr>
+          <a:lstStyle/>
+          <a:p>
+            <a:pPr algn="l">
+              <a:lnSpc>
+                <a:spcPct val="115000"/>
+              </a:lnSpc>
+            </a:pPr>
+            <a:r>
+              <a:rPr sz="900" b="1" i="0" spc="250">
+                <a:solidFill>
+                  <a:srgbClr val="26231F"/>
+                </a:solidFill>
+              </a:rPr>
+              <a:t>CARD NEWS</a:t>
+            </a:r>
+          </a:p>
+        </p:txBody>
+      </p:sp>
+      <p:sp>
+        <p:nvSpPr>
+          <p:cNvPr id="5" name="포인트"/>
           <p:cNvSpPr/>
           <p:nvPr/>
         </p:nvSpPr>
         <p:spPr>
           <a:xfrm>
-            <a:off x="-182880" y="6400800"/>
-            <a:ext cx="7223760" cy="502920"/>
-          </a:xfrm>
-          <a:prstGeom prst="wave">
+            <a:off x="5715000" y="502919"/>
+            <a:ext cx="274320" cy="274320"/>
+          </a:xfrm>
+          <a:prstGeom prst="heart">
             <a:avLst/>
           </a:prstGeom>
           <a:solidFill>
-            <a:srgbClr val="DD4BB1"/>
+            <a:srgbClr val="FFFFFF"/>
           </a:solidFill>
           <a:ln>
             <a:noFill/>
@@ -4472,8 +4742,8 @@
         </p:nvSpPr>
         <p:spPr>
           <a:xfrm>
-            <a:off x="640080" y="457200"/>
-            <a:ext cx="4389120" cy="868680"/>
+            <a:off x="640080" y="658368"/>
+            <a:ext cx="3749039" cy="868680"/>
           </a:xfrm>
         </p:spPr>
         <p:txBody>
@@ -4490,7 +4760,7 @@
             <a:r>
               <a:rPr sz="2600" b="1" i="0">
                 <a:solidFill>
-                  <a:srgbClr val="721D59"/>
+                  <a:srgbClr val="26231F"/>
                 </a:solidFill>
               </a:rPr>
               <a:t>가족 건강 이야기 나누기</a:t>
@@ -4500,13 +4770,13 @@
       </p:sp>
       <p:sp>
         <p:nvSpPr>
-          <p:cNvPr id="5" name="번호"/>
+          <p:cNvPr id="6" name="번호"/>
           <p:cNvSpPr txBox="1"/>
           <p:nvPr/>
         </p:nvSpPr>
         <p:spPr>
           <a:xfrm>
-            <a:off x="640080" y="1645920"/>
+            <a:off x="640080" y="1874519"/>
             <a:ext cx="2194560" cy="1280160"/>
           </a:xfrm>
           <a:prstGeom prst="rect">
@@ -4528,7 +4798,7 @@
             <a:r>
               <a:rPr sz="6600" b="1" i="0">
                 <a:solidFill>
-                  <a:srgbClr val="DD4BB1"/>
+                  <a:srgbClr val="ED97D3"/>
                 </a:solidFill>
               </a:rPr>
               <a:t>05</a:t>
@@ -4538,13 +4808,13 @@
       </p:sp>
       <p:sp>
         <p:nvSpPr>
-          <p:cNvPr id="6" name="본문"/>
+          <p:cNvPr id="7" name="본문"/>
           <p:cNvSpPr txBox="1"/>
           <p:nvPr/>
         </p:nvSpPr>
         <p:spPr>
           <a:xfrm>
-            <a:off x="640080" y="3108960"/>
+            <a:off x="640080" y="3337560"/>
             <a:ext cx="5577840" cy="2651760"/>
           </a:xfrm>
           <a:prstGeom prst="rect">
@@ -4566,7 +4836,7 @@
             <a:r>
               <a:rPr sz="2800" b="0" i="0">
                 <a:solidFill>
-                  <a:srgbClr val="2B2B2B"/>
+                  <a:srgbClr val="26231F"/>
                 </a:solidFill>
               </a:rPr>
               <a:t>일주일에 한 번, 서로의 안부와 컨디션을 물어보세요.</a:t>
@@ -4576,13 +4846,13 @@
       </p:sp>
       <p:sp>
         <p:nvSpPr>
-          <p:cNvPr id="7" name="쪽 번호"/>
+          <p:cNvPr id="8" name="쪽 번호"/>
           <p:cNvSpPr txBox="1"/>
           <p:nvPr/>
         </p:nvSpPr>
         <p:spPr>
           <a:xfrm>
-            <a:off x="640080" y="5577840"/>
+            <a:off x="640080" y="5989320"/>
             <a:ext cx="5577840" cy="365760"/>
           </a:xfrm>
           <a:prstGeom prst="rect">
@@ -4623,6 +4893,14 @@
 <file path=ppt/slides/slide7.xml><?xml version="1.0" encoding="utf-8"?>
 <p:sld xmlns:a="http://schemas.openxmlformats.org/drawingml/2006/main" xmlns:p="http://schemas.openxmlformats.org/presentationml/2006/main" xmlns:r="http://schemas.openxmlformats.org/officeDocument/2006/relationships">
   <p:cSld>
+    <p:bg>
+      <p:bgPr>
+        <a:solidFill>
+          <a:srgbClr val="FDEAF7"/>
+        </a:solidFill>
+        <a:effectLst/>
+      </p:bgPr>
+    </p:bg>
     <p:spTree>
       <p:nvGrpSpPr>
         <p:cNvPr id="1" name=""/>
@@ -4630,30 +4908,102 @@
         <p:nvPr/>
       </p:nvGrpSpPr>
       <p:grpSpPr/>
-      <p:pic>
-        <p:nvPicPr>
-          <p:cNvPr id="3" name="표지 그림" descr="news-07.jpg"/>
-          <p:cNvPicPr>
-            <a:picLocks noChangeAspect="1"/>
-          </p:cNvPicPr>
+      <p:sp>
+        <p:nvSpPr>
+          <p:cNvPr id="3" name="장식"/>
+          <p:cNvSpPr/>
           <p:nvPr/>
-        </p:nvPicPr>
-        <p:blipFill>
-          <a:blip r:embed="rId2"/>
-          <a:stretch>
-            <a:fillRect/>
-          </a:stretch>
-        </p:blipFill>
-        <p:spPr>
-          <a:xfrm>
-            <a:off x="0" y="0"/>
-            <a:ext cx="6858000" cy="6858000"/>
+        </p:nvSpPr>
+        <p:spPr>
+          <a:xfrm>
+            <a:off x="1600200" y="822960"/>
+            <a:ext cx="3657600" cy="3657600"/>
+          </a:xfrm>
+          <a:prstGeom prst="ellipse">
+            <a:avLst/>
+          </a:prstGeom>
+          <a:solidFill>
+            <a:srgbClr val="ED97D3"/>
+          </a:solidFill>
+          <a:ln>
+            <a:noFill/>
+          </a:ln>
+        </p:spPr>
+        <p:txBody>
+          <a:bodyPr rtlCol="0" anchor="ctr"/>
+          <a:lstStyle/>
+          <a:p>
+            <a:pPr algn="ctr"/>
+          </a:p>
+        </p:txBody>
+      </p:sp>
+      <p:sp>
+        <p:nvSpPr>
+          <p:cNvPr id="4" name="장식"/>
+          <p:cNvSpPr/>
+          <p:nvPr/>
+        </p:nvSpPr>
+        <p:spPr>
+          <a:xfrm>
+            <a:off x="3246120" y="502920"/>
+            <a:ext cx="822960" cy="822960"/>
+          </a:xfrm>
+          <a:prstGeom prst="ellipse">
+            <a:avLst/>
+          </a:prstGeom>
+          <a:solidFill>
+            <a:srgbClr val="F2A6DB"/>
+          </a:solidFill>
+          <a:ln>
+            <a:noFill/>
+          </a:ln>
+        </p:spPr>
+        <p:txBody>
+          <a:bodyPr rtlCol="0" anchor="ctr"/>
+          <a:lstStyle/>
+          <a:p>
+            <a:pPr algn="ctr"/>
+          </a:p>
+        </p:txBody>
+      </p:sp>
+      <p:sp>
+        <p:nvSpPr>
+          <p:cNvPr id="5" name="라벨"/>
+          <p:cNvSpPr txBox="1"/>
+          <p:nvPr/>
+        </p:nvSpPr>
+        <p:spPr>
+          <a:xfrm>
+            <a:off x="731520" y="4572000"/>
+            <a:ext cx="5394960" cy="274320"/>
           </a:xfrm>
           <a:prstGeom prst="rect">
             <a:avLst/>
           </a:prstGeom>
-        </p:spPr>
-      </p:pic>
+          <a:noFill/>
+        </p:spPr>
+        <p:txBody>
+          <a:bodyPr wrap="square" lIns="54864" rIns="54864" tIns="27432" bIns="27432" anchor="t">
+            <a:noAutofit/>
+          </a:bodyPr>
+          <a:lstStyle/>
+          <a:p>
+            <a:pPr algn="ctr">
+              <a:lnSpc>
+                <a:spcPct val="115000"/>
+              </a:lnSpc>
+            </a:pPr>
+            <a:r>
+              <a:rPr sz="1000" b="1" i="0" spc="250">
+                <a:solidFill>
+                  <a:srgbClr val="26231F"/>
+                </a:solidFill>
+              </a:rPr>
+              <a:t>CARD NEWS</a:t>
+            </a:r>
+          </a:p>
+        </p:txBody>
+      </p:sp>
       <p:sp>
         <p:nvSpPr>
           <p:cNvPr id="2" name="Title 1"/>
@@ -4666,8 +5016,8 @@
         </p:nvSpPr>
         <p:spPr>
           <a:xfrm>
-            <a:off x="685800" y="960120"/>
-            <a:ext cx="5486400" cy="1463040"/>
+            <a:off x="731520" y="4892040"/>
+            <a:ext cx="5394960" cy="914400"/>
           </a:xfrm>
         </p:spPr>
         <p:txBody>
@@ -4676,7 +5026,7 @@
           </a:bodyPr>
           <a:lstStyle/>
           <a:p>
-            <a:pPr algn="l">
+            <a:pPr algn="ctr">
               <a:lnSpc>
                 <a:spcPct val="105000"/>
               </a:lnSpc>
@@ -4684,7 +5034,7 @@
             <a:r>
               <a:rPr sz="2800" b="1" i="0">
                 <a:solidFill>
-                  <a:srgbClr val="721D59"/>
+                  <a:srgbClr val="26231F"/>
                 </a:solidFill>
               </a:rPr>
               <a:t>저장해 두고 필요할 때 꺼내 보세요</a:t>
@@ -4694,14 +5044,14 @@
       </p:sp>
       <p:sp>
         <p:nvSpPr>
-          <p:cNvPr id="4" name="한 줄 문구"/>
+          <p:cNvPr id="6" name="한 줄 문구"/>
           <p:cNvSpPr txBox="1"/>
           <p:nvPr/>
         </p:nvSpPr>
         <p:spPr>
           <a:xfrm>
-            <a:off x="685800" y="2560320"/>
-            <a:ext cx="5486400" cy="822960"/>
+            <a:off x="731520" y="5806440"/>
+            <a:ext cx="5394960" cy="822960"/>
           </a:xfrm>
           <a:prstGeom prst="rect">
             <a:avLst/>
@@ -4714,15 +5064,15 @@
           </a:bodyPr>
           <a:lstStyle/>
           <a:p>
-            <a:pPr algn="l">
+            <a:pPr algn="ctr">
               <a:lnSpc>
                 <a:spcPct val="115000"/>
               </a:lnSpc>
             </a:pPr>
             <a:r>
-              <a:rPr sz="1500" b="0" i="1">
+              <a:rPr sz="1500" b="0" i="0">
                 <a:solidFill>
-                  <a:srgbClr val="721D59"/>
+                  <a:srgbClr val="26231F"/>
                 </a:solidFill>
               </a:rPr>
               <a:t>마음에 들면 공유해 주세요</a:t>
@@ -4732,14 +5082,14 @@
       </p:sp>
       <p:sp>
         <p:nvSpPr>
-          <p:cNvPr id="5" name="안내 문구"/>
+          <p:cNvPr id="7" name="안내 문구"/>
           <p:cNvSpPr txBox="1"/>
           <p:nvPr/>
         </p:nvSpPr>
         <p:spPr>
           <a:xfrm>
-            <a:off x="685800" y="3429000"/>
-            <a:ext cx="5486400" cy="914400"/>
+            <a:off x="731520" y="6675120"/>
+            <a:ext cx="5394960" cy="914400"/>
           </a:xfrm>
           <a:prstGeom prst="rect">
             <a:avLst/>
@@ -4752,7 +5102,7 @@
           </a:bodyPr>
           <a:lstStyle/>
           <a:p>
-            <a:pPr algn="l">
+            <a:pPr algn="ctr">
               <a:lnSpc>
                 <a:spcPct val="115000"/>
               </a:lnSpc>
@@ -4760,7 +5110,7 @@
             <a:r>
               <a:rPr sz="1200" b="0" i="0">
                 <a:solidFill>
-                  <a:srgbClr val="666666"/>
+                  <a:srgbClr val="26231F"/>
                 </a:solidFill>
               </a:rPr>
               <a:t>이름 · 연락처를 입력하세요</a:t>
@@ -4787,34 +5137,34 @@
         <a:sysClr val="window" lastClr="FFFFFF"/>
       </a:lt1>
       <a:dk2>
-        <a:srgbClr val="721D59"/>
+        <a:srgbClr val="49273F"/>
       </a:dk2>
       <a:lt2>
-        <a:srgbClr val="FDF4FA"/>
+        <a:srgbClr val="FDEAF7"/>
       </a:lt2>
       <a:accent1>
-        <a:srgbClr val="DD4BB1"/>
+        <a:srgbClr val="ED97D3"/>
       </a:accent1>
       <a:accent2>
-        <a:srgbClr val="30A640"/>
+        <a:srgbClr val="F3BAC7"/>
       </a:accent2>
       <a:accent3>
-        <a:srgbClr val="721D59"/>
+        <a:srgbClr val="49273F"/>
       </a:accent3>
       <a:accent4>
-        <a:srgbClr val="FBDAF1"/>
+        <a:srgbClr val="FAD1EE"/>
       </a:accent4>
       <a:accent5>
-        <a:srgbClr val="867878"/>
+        <a:srgbClr val="F0A8CD"/>
       </a:accent5>
       <a:accent6>
-        <a:srgbClr val="AA779B"/>
+        <a:srgbClr val="927D8C"/>
       </a:accent6>
       <a:hlink>
-        <a:srgbClr val="DD4BB1"/>
+        <a:srgbClr val="ED97D3"/>
       </a:hlink>
       <a:folHlink>
-        <a:srgbClr val="721D59"/>
+        <a:srgbClr val="49273F"/>
       </a:folHlink>
     </a:clrScheme>
     <a:fontScheme name="Office">
